--- a/day4_ethics_physiology/slides.pptx
+++ b/day4_ethics_physiology/slides.pptx
@@ -2024,7 +2024,7 @@
           <a:p/>
           <a:p>
             <a:r>
-              <a:t>7 min. Santos et al. (2017) Nature Rev. Drug Discov. 16:19-34: comprehensive map of drug targets.</a:t>
+              <a:t>7 min. CITATION: Santos et al. (2017) 'A comprehensive map of molecular drug targets.' Nature Rev. Drug Discov. 16:19-34. Note: Santos reports ion channels as ~6% of primary efficacy targets, NOT 18%. The 18% figure is sometimes cited but is incorrect — it likely conflates different target categories. GPCRs are ~34% (the largest family). Ion channels remain critically important despite the smaller percentage because of safety (hERG) and neurological disease applications.</a:t>
             </a:r>
           </a:p>
           <a:p/>
@@ -2047,7 +2047,7 @@
           <a:p/>
           <a:p>
             <a:r>
-              <a:t>Dr. Serbe-Kamp's 2023 Nature Neuroscience paper (Haag, Arenz, Serbe-Kamp et al.) found GluClα mediates direction-opponent inhibition in the Drosophila visual system. Same channel family, different organism, different function.</a:t>
+              <a:t>Dr. Serbe-Kamp's 2023 Nature Neuroscience paper (Ammer, Serbe-Kamp et al., Nature Neurosci. 26:1894-1905) found GluClα mediates direction-opponent inhibition in the Drosophila visual system. Same channel family, different organism, different function.</a:t>
             </a:r>
           </a:p>
           <a:p/>
@@ -2058,7 +2058,7 @@
           </a:p>
           <a:p>
             <a:r>
-              <a:t>hERG (human Ether-à-go-go Related Gene) channel is MANDATORY for drug safety. Block of hERG can cause QT prolongation → cardiac arrhythmia → sudden death. EVERY drug candidate must be tested. The ICH S7B guideline requires this.</a:t>
+              <a:t>hERG (human Ether-à-go-go Related Gene) channel is MANDATORY for drug safety. Block of hERG can cause QT prolongation → cardiac arrhythmia → sudden death. EVERY drug candidate must be tested. CITATION: Redfern et al. (2003) 'Relationships between preclinical cardiac electrophysiology, clinical QT interval prolongation and torsade de pointes.' Cardiovasc. Res. 58:32-45. The ICH S7B guideline requires hERG testing.</a:t>
             </a:r>
           </a:p>
           <a:p/>
@@ -9543,7 +9543,7 @@
               </a:defRPr>
             </a:pPr>
             <a:r>
-              <a:t>Ion channels = ~18% of all drug targets (Santos et al. 2017)</a:t>
+              <a:t>Ion channels = ~6% of primary drug targets (Santos et al. 2017, Nat. Rev. Drug Discov. 16:19-34)</a:t>
             </a:r>
           </a:p>
           <a:p>
@@ -9758,7 +9758,7 @@
               </a:defRPr>
             </a:pPr>
             <a:r>
-              <a:t>Dr. Serbe-Kamp's GluClα research (2023 Nat.Neurosci.) → ivermectin target</a:t>
+              <a:t>GluClα research: Ammer, Serbe-Kamp et al. (2023, Nat. Neurosci. 26:1894-1905) → ivermectin target</a:t>
             </a:r>
           </a:p>
         </p:txBody>

--- a/day4_ethics_physiology/slides.pptx
+++ b/day4_ethics_physiology/slides.pptx
@@ -5325,7 +5325,7 @@
               </a:defRPr>
             </a:pPr>
             <a:r>
-              <a:t>Dr. Serbe-Kamp's Physiology Research → Drug Discovery</a:t>
+              <a:t>Physiology Research → Drug Discovery</a:t>
             </a:r>
           </a:p>
         </p:txBody>
@@ -7144,7 +7144,7 @@
               </a:defRPr>
             </a:pPr>
             <a:r>
-              <a:t>Dr. Serbe-Kamp's 2016 Neuron paper = physiology of cells (not connectomics!)</a:t>
+              <a:t>Serbe et al. (2016) Neuron paper = physiology of cells (not connectomics!)</a:t>
             </a:r>
           </a:p>
           <a:p>
@@ -7668,7 +7668,7 @@
               </a:defRPr>
             </a:pPr>
             <a:r>
-              <a:t>  Dr. Serbe-Kamp's physiology research meets drug discovery</a:t>
+              <a:t>  Physiology research meets drug discovery</a:t>
             </a:r>
           </a:p>
           <a:p>
@@ -9236,7 +9236,7 @@
               </a:defRPr>
             </a:pPr>
             <a:r>
-              <a:t>  → Patch-clamp, calcium imaging — Dr. Serbe-Kamp's 2016 Neuron paper</a:t>
+              <a:t>  → Patch-clamp, calcium imaging — Serbe et al. (2016) Neuron 89:829-841</a:t>
             </a:r>
           </a:p>
           <a:p>
